--- a/public/fun/pack/pptx/newspro/카드뉴스프리미엄_45_오늘의한마디_베이비블루.pptx
+++ b/public/fun/pack/pptx/newspro/카드뉴스프리미엄_45_오늘의한마디_베이비블루.pptx
@@ -113,12 +113,12 @@
   <p:extLst>
     <p:ext uri="{521415D9-36F7-43E2-AB2F-B90AF26B5E84}">
       <p14:sectionLst xmlns:p14="http://schemas.microsoft.com/office/powerpoint/2010/main">
-        <p14:section name="시작" id="{224D7289-6585-4C56-91EC-1DE8A4CB976F}">
+        <p14:section name="시작" id="{B72AD1E2-F772-4BCE-8539-111AB63395F1}">
           <p14:sldIdLst>
             <p14:sldId id="256"/>
           </p14:sldIdLst>
         </p14:section>
-        <p14:section name="본문" id="{017D7477-9FF4-4A37-BA5D-B8872F3D8EE0}">
+        <p14:section name="본문" id="{9189CFEF-73A6-4ED1-93ED-B9D1CBA9ACD0}">
           <p14:sldIdLst>
             <p14:sldId id="257"/>
             <p14:sldId id="258"/>
@@ -127,7 +127,7 @@
             <p14:sldId id="261"/>
           </p14:sldIdLst>
         </p14:section>
-        <p14:section name="마무리" id="{4CA5C07A-6C91-4CB6-8AE7-80168FC62F3F}">
+        <p14:section name="마무리" id="{FD38C176-118D-49BA-B4FB-16F66C6576C7}">
           <p14:sldIdLst>
             <p14:sldId id="262"/>
           </p14:sldIdLst>
@@ -1537,7 +1537,7 @@
             </a:lvl1pPr>
           </a:lstStyle>
           <a:p>
-            <a:fld id="{B01BC050-3F78-479F-8B41-3D88258B1C4E}" type="slidenum">
+            <a:fld id="{2A37D9EE-FAB4-4B15-A8FC-24549D038E45}" type="slidenum">
               <a:rPr lang="en-US"/>
               <a:t>‹#›</a:t>
             </a:fld>
@@ -2306,7 +2306,7 @@
             </a:lvl1pPr>
           </a:lstStyle>
           <a:p>
-            <a:fld id="{C56A4A6D-CC53-4900-B81D-040FF19A4D8F}" type="slidenum">
+            <a:fld id="{9E1C1558-D0D0-4988-A3FB-3A73C5D1D974}" type="slidenum">
               <a:rPr lang="en-US"/>
               <a:t>‹#›</a:t>
             </a:fld>
@@ -3059,7 +3059,7 @@
             </a:lvl1pPr>
           </a:lstStyle>
           <a:p>
-            <a:fld id="{AF0A51A0-0880-4CFD-A902-95B50F1593A2}" type="slidenum">
+            <a:fld id="{D553AAAD-E1C1-44F2-A86F-16196A24FDC5}" type="slidenum">
               <a:rPr lang="en-US"/>
               <a:t>‹#›</a:t>
             </a:fld>
@@ -4092,7 +4092,7 @@
           <a:bodyPr/>
           <a:lstStyle/>
           <a:p>
-            <a:fld id="{5D219AE3-F8D9-4499-AB9F-8A6103AC46EE}" type="slidenum">
+            <a:fld id="{397C1214-7347-493F-BA26-A222172F870F}" type="slidenum">
               <a:rPr lang="en-US"/>
               <a:t>‹#›</a:t>
             </a:fld>
@@ -4258,7 +4258,7 @@
           <a:bodyPr/>
           <a:lstStyle/>
           <a:p>
-            <a:fld id="{A790C035-3173-4AFE-BCAE-DE495FD62CBE}" type="slidenum">
+            <a:fld id="{DDE84D61-82F8-4D63-A78D-8DF9A6AC91A9}" type="slidenum">
               <a:rPr lang="en-US"/>
               <a:t>‹#›</a:t>
             </a:fld>
@@ -4424,7 +4424,7 @@
           <a:bodyPr/>
           <a:lstStyle/>
           <a:p>
-            <a:fld id="{991E6395-5F44-4792-99FE-D00AD0C1886B}" type="slidenum">
+            <a:fld id="{C9F5BFA6-79D6-4000-A67B-20A1F45DB853}" type="slidenum">
               <a:rPr lang="en-US"/>
               <a:t>‹#›</a:t>
             </a:fld>
@@ -4590,7 +4590,7 @@
           <a:bodyPr/>
           <a:lstStyle/>
           <a:p>
-            <a:fld id="{2DC5AF83-C615-474F-A22D-C90B1C1CFD94}" type="slidenum">
+            <a:fld id="{FDAB47EC-7694-4497-912C-A93A1CC7BD52}" type="slidenum">
               <a:rPr lang="en-US"/>
               <a:t>‹#›</a:t>
             </a:fld>
@@ -4756,7 +4756,7 @@
           <a:bodyPr/>
           <a:lstStyle/>
           <a:p>
-            <a:fld id="{1C957FE1-6FD1-4E54-8028-466A4E7D65F2}" type="slidenum">
+            <a:fld id="{3DF38FF8-905E-4ACE-87BE-F3EFF0F84E24}" type="slidenum">
               <a:rPr lang="en-US"/>
               <a:t>‹#›</a:t>
             </a:fld>
